--- a/decks/englit-macbeth/englit-macbeth_ch2_witches-and-ambition.pptx
+++ b/decks/englit-macbeth/englit-macbeth_ch2_witches-and-ambition.pptx
@@ -124,36 +124,36 @@
   <p:extLst>
     <p:ext uri="{521415D9-36F7-43E2-AB2F-B90AF26B5E84}">
       <p14:sectionLst xmlns:p14="http://schemas.microsoft.com/office/powerpoint/2010/main">
-        <p14:section name="Opening" id="{a43a71e5-156b-344f-620a-d4c12bfe02af}">
+        <p14:section name="Opening" id="{231c4695-3173-8815-27db-d202ce9f993b}">
           <p14:sldIdLst>
             <p14:sldId id="256"/>
           </p14:sldIdLst>
         </p14:section>
-        <p14:section name="Gate" id="{cb917c9d-4d0e-e477-51c7-9436aef2ffb8}">
+        <p14:section name="Gate" id="{c3fb4a82-1a4f-bb3b-d1f4-610712ccf4ca}">
           <p14:sldIdLst>
             <p14:sldId id="257"/>
             <p14:sldId id="258"/>
           </p14:sldIdLst>
         </p14:section>
-        <p14:section name="Pre-teach" id="{7134361d-ea11-7195-a110-e93c1cf83498}">
+        <p14:section name="Pre-teach" id="{f5e37e0f-9f89-203f-e235-abe344456783}">
           <p14:sldIdLst>
             <p14:sldId id="259"/>
           </p14:sldIdLst>
         </p14:section>
-        <p14:section name="Read-along" id="{89f945be-4e50-4eff-5c57-e0b00fda0e6c}">
+        <p14:section name="Read-along" id="{53b784b1-38ec-54fe-8a80-3d0a8b01e29c}">
           <p14:sldIdLst>
             <p14:sldId id="260"/>
             <p14:sldId id="261"/>
           </p14:sldIdLst>
         </p14:section>
-        <p14:section name="Teach" id="{02153dae-f407-fce9-5477-7d247bb36efa}">
+        <p14:section name="Teach" id="{1f795ae7-5d1a-aa4f-9f5d-becd049df157}">
           <p14:sldIdLst>
             <p14:sldId id="262"/>
             <p14:sldId id="263"/>
             <p14:sldId id="264"/>
           </p14:sldIdLst>
         </p14:section>
-        <p14:section name="Routes" id="{547df65d-4c25-e6c7-6a10-4887677534a7}">
+        <p14:section name="Routes" id="{b400ee97-def4-0916-52dd-60197d9ab1d9}">
           <p14:sldIdLst>
             <p14:sldId id="265"/>
             <p14:sldId id="266"/>
@@ -161,12 +161,12 @@
             <p14:sldId id="268"/>
           </p14:sldIdLst>
         </p14:section>
-        <p14:section name="Close" id="{19c11749-7d65-6b11-a836-4df8697af684}">
+        <p14:section name="Close" id="{fded466c-0910-89b2-4fda-8b4a195c8f2e}">
           <p14:sldIdLst>
             <p14:sldId id="269"/>
           </p14:sldIdLst>
         </p14:section>
-        <p14:section name="Answers" id="{fc900ec8-0b94-d9ad-5448-ddaf03b03534}">
+        <p14:section name="Answers" id="{0ec6b3cc-00f1-9e91-418e-fd5cb46ddac4}">
           <p14:sldIdLst>
             <p14:sldId id="270"/>
             <p14:sldId id="271"/>
@@ -1506,9 +1506,9 @@
             <a:r>
               <a:rPr lang="en-US" dirty="0"/>
               <a:t>Do now — retrieval. Silent, no notes, no help: recall comes before any support. Give about four minutes.
-1. What do the witches predict for Banquo?  →  C   His children will be kings
+1. What do the witches predict for Banquo?  →  D   His children will be kings
 2. Complete the witches' line: “Fair is foul, and foul is ___.”  →  fair
-3. What does the word ‘hamartia’ mean?  →  B   A tragic hero's fatal flaw
+3. What does the word ‘hamartia’ mean?  →  D   A tragic hero's fatal flaw
 Circulate: who gets 3/3 (Stretch route), 2/3 (Core), 0–1 (Support)? Use this to route pupils later in the lesson.</a:t>
             </a:r>
             <a:endParaRPr lang="en-US" dirty="0"/>
@@ -1598,9 +1598,9 @@
             <a:r>
               <a:rPr lang="en-US" dirty="0"/>
               <a:t>Answers — pupils mark their own in a different colour, then hands up for 3/3, 2/3, 1/3.
-1. C   His children will be kings. Banquo will not be king himself, but his descendants will. This is why Macbeth later fears him.
+1. D   His children will be kings. Banquo will not be king himself, but his descendants will. This is why Macbeth later fears him.
 2. fair. The paradox swaps good and evil, warning that appearances in this play cannot be trusted.
-3. B   A tragic hero's fatal flaw. Hamartia is the flaw that brings a tragic hero down. For Macbeth, it is usually read as ambition.
+3. D   A tragic hero's fatal flaw. Hamartia is the flaw that brings a tragic hero down. For Macbeth, it is usually read as ambition.
 Say the route each score points to: 3/3 Stretch, 2/3 Core, 0–1 Support. Pupils may choose to move up.</a:t>
             </a:r>
             <a:endParaRPr lang="en-US" dirty="0"/>
@@ -7864,7 +7864,7 @@
                 <a:ea typeface="Calibri" pitchFamily="34" charset="-122"/>
                 <a:cs typeface="Calibri" pitchFamily="34" charset="-120"/>
               </a:rPr>
-              <a:t>Because Duncan is lying about Cawdor</a:t>
+              <a:t>Because Banquo has already warned Duncan</a:t>
             </a:r>
             <a:endParaRPr lang="en-US" sz="2200" dirty="0"/>
           </a:p>
@@ -7938,7 +7938,7 @@
                 <a:ea typeface="Calibri" pitchFamily="34" charset="-122"/>
                 <a:cs typeface="Calibri" pitchFamily="34" charset="-120"/>
               </a:rPr>
-              <a:t>Because Macbeth does not know who Cawdor was</a:t>
+              <a:t>Because Duncan is lying about Cawdor</a:t>
             </a:r>
             <a:endParaRPr lang="en-US" sz="2200" dirty="0"/>
           </a:p>
@@ -7975,7 +7975,7 @@
                 <a:ea typeface="Calibri" pitchFamily="34" charset="-122"/>
                 <a:cs typeface="Calibri" pitchFamily="34" charset="-120"/>
               </a:rPr>
-              <a:t>Because Banquo has already warned Duncan</a:t>
+              <a:t>Because Macbeth does not know who Cawdor was</a:t>
             </a:r>
             <a:endParaRPr lang="en-US" sz="2200" dirty="0"/>
           </a:p>
@@ -10366,7 +10366,7 @@
           <a:p>
             <a:pPr algn="l" indent="0" marL="0">
               <a:spcAft>
-                <a:spcPts val="600"/>
+                <a:spcPts val="200"/>
               </a:spcAft>
               <a:buNone/>
             </a:pPr>
@@ -10383,7 +10383,7 @@
             </a:r>
             <a:pPr algn="l" indent="0" marL="0">
               <a:spcAft>
-                <a:spcPts val="600"/>
+                <a:spcPts val="200"/>
               </a:spcAft>
               <a:buNone/>
             </a:pPr>
@@ -10403,7 +10403,7 @@
           <a:p>
             <a:pPr algn="l" indent="0" marL="0">
               <a:spcAft>
-                <a:spcPts val="600"/>
+                <a:spcPts val="200"/>
               </a:spcAft>
               <a:buNone/>
             </a:pPr>
@@ -10420,7 +10420,7 @@
             </a:r>
             <a:pPr algn="l" indent="0" marL="0">
               <a:spcAft>
-                <a:spcPts val="600"/>
+                <a:spcPts val="200"/>
               </a:spcAft>
               <a:buNone/>
             </a:pPr>
@@ -10433,6 +10433,43 @@
                 <a:ea typeface="Calibri" pitchFamily="34" charset="-122"/>
                 <a:cs typeface="Calibri" pitchFamily="34" charset="-120"/>
               </a:rPr>
+              <a:t>He will rule England</a:t>
+            </a:r>
+            <a:endParaRPr lang="en-US" sz="2400" dirty="0"/>
+          </a:p>
+          <a:p>
+            <a:pPr algn="l" indent="0" marL="0">
+              <a:spcAft>
+                <a:spcPts val="200"/>
+              </a:spcAft>
+              <a:buNone/>
+            </a:pPr>
+            <a:r>
+              <a:rPr lang="en-US" sz="2400" b="1" dirty="0">
+                <a:solidFill>
+                  <a:srgbClr val="B8862B"/>
+                </a:solidFill>
+                <a:latin typeface="Calibri" pitchFamily="34" charset="0"/>
+                <a:ea typeface="Calibri" pitchFamily="34" charset="-122"/>
+                <a:cs typeface="Calibri" pitchFamily="34" charset="-120"/>
+              </a:rPr>
+              <a:t>C   </a:t>
+            </a:r>
+            <a:pPr algn="l" indent="0" marL="0">
+              <a:spcAft>
+                <a:spcPts val="200"/>
+              </a:spcAft>
+              <a:buNone/>
+            </a:pPr>
+            <a:r>
+              <a:rPr lang="en-US" sz="2400" dirty="0">
+                <a:solidFill>
+                  <a:srgbClr val="1E2229"/>
+                </a:solidFill>
+                <a:latin typeface="Calibri" pitchFamily="34" charset="0"/>
+                <a:ea typeface="Calibri" pitchFamily="34" charset="-122"/>
+                <a:cs typeface="Calibri" pitchFamily="34" charset="-120"/>
+              </a:rPr>
               <a:t>He will kill Duncan</a:t>
             </a:r>
             <a:endParaRPr lang="en-US" sz="2400" dirty="0"/>
@@ -10440,7 +10477,7 @@
           <a:p>
             <a:pPr algn="l" indent="0" marL="0">
               <a:spcAft>
-                <a:spcPts val="600"/>
+                <a:spcPts val="200"/>
               </a:spcAft>
               <a:buNone/>
             </a:pPr>
@@ -10453,11 +10490,11 @@
                 <a:ea typeface="Calibri" pitchFamily="34" charset="-122"/>
                 <a:cs typeface="Calibri" pitchFamily="34" charset="-120"/>
               </a:rPr>
-              <a:t>C   </a:t>
+              <a:t>D   </a:t>
             </a:r>
             <a:pPr algn="l" indent="0" marL="0">
               <a:spcAft>
-                <a:spcPts val="600"/>
+                <a:spcPts val="200"/>
               </a:spcAft>
               <a:buNone/>
             </a:pPr>
@@ -10471,43 +10508,6 @@
                 <a:cs typeface="Calibri" pitchFamily="34" charset="-120"/>
               </a:rPr>
               <a:t>His children will be kings</a:t>
-            </a:r>
-            <a:endParaRPr lang="en-US" sz="2400" dirty="0"/>
-          </a:p>
-          <a:p>
-            <a:pPr algn="l" indent="0" marL="0">
-              <a:spcAft>
-                <a:spcPts val="600"/>
-              </a:spcAft>
-              <a:buNone/>
-            </a:pPr>
-            <a:r>
-              <a:rPr lang="en-US" sz="2400" b="1" dirty="0">
-                <a:solidFill>
-                  <a:srgbClr val="B8862B"/>
-                </a:solidFill>
-                <a:latin typeface="Calibri" pitchFamily="34" charset="0"/>
-                <a:ea typeface="Calibri" pitchFamily="34" charset="-122"/>
-                <a:cs typeface="Calibri" pitchFamily="34" charset="-120"/>
-              </a:rPr>
-              <a:t>D   </a:t>
-            </a:r>
-            <a:pPr algn="l" indent="0" marL="0">
-              <a:spcAft>
-                <a:spcPts val="600"/>
-              </a:spcAft>
-              <a:buNone/>
-            </a:pPr>
-            <a:r>
-              <a:rPr lang="en-US" sz="2400" dirty="0">
-                <a:solidFill>
-                  <a:srgbClr val="1E2229"/>
-                </a:solidFill>
-                <a:latin typeface="Calibri" pitchFamily="34" charset="0"/>
-                <a:ea typeface="Calibri" pitchFamily="34" charset="-122"/>
-                <a:cs typeface="Calibri" pitchFamily="34" charset="-120"/>
-              </a:rPr>
-              <a:t>He will rule England</a:t>
             </a:r>
             <a:endParaRPr lang="en-US" sz="2400" dirty="0"/>
           </a:p>
@@ -10946,7 +10946,7 @@
                 <a:ea typeface="Calibri" pitchFamily="34" charset="-122"/>
                 <a:cs typeface="Calibri" pitchFamily="34" charset="-120"/>
               </a:rPr>
-              <a:t>A tragic hero's fatal flaw</a:t>
+              <a:t>A type of witch</a:t>
             </a:r>
             <a:endParaRPr lang="en-US" sz="2400" dirty="0"/>
           </a:p>
@@ -10983,7 +10983,7 @@
                 <a:ea typeface="Calibri" pitchFamily="34" charset="-122"/>
                 <a:cs typeface="Calibri" pitchFamily="34" charset="-120"/>
               </a:rPr>
-              <a:t>A type of witch</a:t>
+              <a:t>A rhyming couplet</a:t>
             </a:r>
             <a:endParaRPr lang="en-US" sz="2400" dirty="0"/>
           </a:p>
@@ -11020,7 +11020,7 @@
                 <a:ea typeface="Calibri" pitchFamily="34" charset="-122"/>
                 <a:cs typeface="Calibri" pitchFamily="34" charset="-120"/>
               </a:rPr>
-              <a:t>A rhyming couplet</a:t>
+              <a:t>A tragic hero's fatal flaw</a:t>
             </a:r>
             <a:endParaRPr lang="en-US" sz="2400" dirty="0"/>
           </a:p>
@@ -11421,7 +11421,7 @@
                 <a:ea typeface="Calibri" pitchFamily="34" charset="-122"/>
                 <a:cs typeface="Calibri" pitchFamily="34" charset="-120"/>
               </a:rPr>
-              <a:t>C   His children will be kings</a:t>
+              <a:t>D   His children will be kings</a:t>
             </a:r>
             <a:endParaRPr lang="en-US" sz="2200" dirty="0"/>
           </a:p>
@@ -11921,7 +11921,7 @@
                 <a:ea typeface="Calibri" pitchFamily="34" charset="-122"/>
                 <a:cs typeface="Calibri" pitchFamily="34" charset="-120"/>
               </a:rPr>
-              <a:t>B   A tragic hero's fatal flaw</a:t>
+              <a:t>D   A tragic hero's fatal flaw</a:t>
             </a:r>
             <a:endParaRPr lang="en-US" sz="2200" dirty="0"/>
           </a:p>

--- a/decks/englit-macbeth/englit-macbeth_ch2_witches-and-ambition.pptx
+++ b/decks/englit-macbeth/englit-macbeth_ch2_witches-and-ambition.pptx
@@ -124,36 +124,36 @@
   <p:extLst>
     <p:ext uri="{521415D9-36F7-43E2-AB2F-B90AF26B5E84}">
       <p14:sectionLst xmlns:p14="http://schemas.microsoft.com/office/powerpoint/2010/main">
-        <p14:section name="Opening" id="{231c4695-3173-8815-27db-d202ce9f993b}">
+        <p14:section name="Opening" id="{644804cd-6202-d40a-7cd7-1263b9831072}">
           <p14:sldIdLst>
             <p14:sldId id="256"/>
           </p14:sldIdLst>
         </p14:section>
-        <p14:section name="Gate" id="{c3fb4a82-1a4f-bb3b-d1f4-610712ccf4ca}">
+        <p14:section name="Gate" id="{123d22fd-94c5-c179-67f4-89afc8275174}">
           <p14:sldIdLst>
             <p14:sldId id="257"/>
             <p14:sldId id="258"/>
           </p14:sldIdLst>
         </p14:section>
-        <p14:section name="Pre-teach" id="{f5e37e0f-9f89-203f-e235-abe344456783}">
+        <p14:section name="Pre-teach" id="{554aa938-ef09-8a9a-dffd-87139fc5b4d4}">
           <p14:sldIdLst>
             <p14:sldId id="259"/>
           </p14:sldIdLst>
         </p14:section>
-        <p14:section name="Read-along" id="{53b784b1-38ec-54fe-8a80-3d0a8b01e29c}">
+        <p14:section name="Read-along" id="{7107b606-14a1-fe13-6630-d4be7f7b8a4a}">
           <p14:sldIdLst>
             <p14:sldId id="260"/>
             <p14:sldId id="261"/>
           </p14:sldIdLst>
         </p14:section>
-        <p14:section name="Teach" id="{1f795ae7-5d1a-aa4f-9f5d-becd049df157}">
+        <p14:section name="Teach" id="{915bb346-38e3-68b2-f9d6-8b29f5a862bb}">
           <p14:sldIdLst>
             <p14:sldId id="262"/>
             <p14:sldId id="263"/>
             <p14:sldId id="264"/>
           </p14:sldIdLst>
         </p14:section>
-        <p14:section name="Routes" id="{b400ee97-def4-0916-52dd-60197d9ab1d9}">
+        <p14:section name="Routes" id="{09efcbaa-c8f1-1205-614b-3bb622464b0d}">
           <p14:sldIdLst>
             <p14:sldId id="265"/>
             <p14:sldId id="266"/>
@@ -161,12 +161,12 @@
             <p14:sldId id="268"/>
           </p14:sldIdLst>
         </p14:section>
-        <p14:section name="Close" id="{fded466c-0910-89b2-4fda-8b4a195c8f2e}">
+        <p14:section name="Close" id="{7af21882-3488-c59e-430f-6c5bb11dd0ef}">
           <p14:sldIdLst>
             <p14:sldId id="269"/>
           </p14:sldIdLst>
         </p14:section>
-        <p14:section name="Answers" id="{0ec6b3cc-00f1-9e91-418e-fd5cb46ddac4}">
+        <p14:section name="Answers" id="{d6dcc990-f2f6-8c13-59e9-6610ba0e6215}">
           <p14:sldIdLst>
             <p14:sldId id="270"/>
             <p14:sldId id="271"/>
